--- a/kritter_village_growth.pptx
+++ b/kritter_village_growth.pptx
@@ -6804,7 +6804,7 @@
                 <a:ea typeface="Calibri" pitchFamily="34" charset="-122"/>
                 <a:cs typeface="Calibri" pitchFamily="34" charset="-120"/>
               </a:rPr>
-              <a:t>Output: ml_growth_prob (0–100) · AUC ≈ 0.87 (in-sample, self-supervised — not external validation)</a:t>
+              <a:t>Output: ml_growth_prob (0–100) · AUC = 1.000 (in-sample, self-supervised) — GBM memorises its own self-supervised labels; this is the mathematically expected result, not a sign of external validity</a:t>
             </a:r>
             <a:endParaRPr lang="en-US" sz="1000" dirty="0"/>
           </a:p>
@@ -7538,7 +7538,7 @@
                 <a:ea typeface="Calibri" pitchFamily="34" charset="-122"/>
                 <a:cs typeface="Calibri" pitchFamily="34" charset="-120"/>
               </a:rPr>
-              <a:t>Pre-filters: NTL 2019 ≥ 0.1 nW/cm²/sr + India polygon filter + Δ NTL ≥ 0.5 nW/cm²/sr absolute minimum  ·  Normalisation: rank percentile → 0–100  ·  ⚠ Score compression: top ~50 villages score 85.07–85.08 (&lt; 0.01 pt spread) — treat as a statistical shortlist, not a strict ranking</a:t>
+              <a:t>Pre-filters: NTL 2019 ≥ 0.1 nW/cm²/sr + India polygon filter + Δ NTL ≥ 1.0 nW/cm²/sr absolute minimum  ·  Normalisation: min-max (2nd/99th pct clip) → 0–100  ·  Score spread: top-100 range 73.85–70.04 (3.81 pts); rank-50 = 71.65. Spread was &lt; 0.01 pt before minmax fix. Restoring Sentinel-2/SAR will widen it further. Treat top-100 as a statistical shortlist.</a:t>
             </a:r>
             <a:endParaRPr lang="en-US" sz="900" dirty="0"/>
           </a:p>
@@ -7639,8 +7639,8 @@
               <a:tblPr/>
               <a:tblGrid>
                 <a:gridCol w="347472"/>
+                <a:gridCol w="1481328"/>
                 <a:gridCol w="1828800"/>
-                <a:gridCol w="1481328"/>
                 <a:gridCol w="1051560"/>
               </a:tblGrid>
               <a:tr h="357447">
@@ -7797,7 +7797,7 @@
                           <a:ea typeface="Calibri" pitchFamily="34" charset="-122"/>
                           <a:cs typeface="Calibri" pitchFamily="34" charset="-120"/>
                         </a:rPr>
-                        <a:t>State</a:t>
+                        <a:t>State / Dist.</a:t>
                       </a:r>
                       <a:endParaRPr lang="en-US" sz="1200" dirty="0">
                         <a:latin typeface="Calibri" charset="0"/>
@@ -8003,7 +8003,7 @@
                           <a:ea typeface="Calibri" pitchFamily="34" charset="-122"/>
                           <a:cs typeface="Calibri" pitchFamily="34" charset="-120"/>
                         </a:rPr>
-                        <a:t>Unnamed † (Maharajganj)</a:t>
+                        <a:t>nr. Siswa Bazar †</a:t>
                       </a:r>
                       <a:endParaRPr lang="en-US" sz="1000" dirty="0">
                         <a:latin typeface="Calibri" charset="0"/>
@@ -8071,7 +8071,7 @@
                           <a:ea typeface="Calibri" pitchFamily="34" charset="-122"/>
                           <a:cs typeface="Calibri" pitchFamily="34" charset="-120"/>
                         </a:rPr>
-                        <a:t>Uttar Pradesh</a:t>
+                        <a:t>Maharajganj, UP</a:t>
                       </a:r>
                       <a:endParaRPr lang="en-US" sz="1000" dirty="0">
                         <a:latin typeface="Calibri" charset="0"/>
@@ -8277,7 +8277,7 @@
                           <a:ea typeface="Calibri" pitchFamily="34" charset="-122"/>
                           <a:cs typeface="Calibri" pitchFamily="34" charset="-120"/>
                         </a:rPr>
-                        <a:t>Unnamed † (Maharajganj)</a:t>
+                        <a:t>nr. Siswa Bazar †</a:t>
                       </a:r>
                       <a:endParaRPr lang="en-US" sz="1000" dirty="0">
                         <a:latin typeface="Calibri" charset="0"/>
@@ -8345,7 +8345,7 @@
                           <a:ea typeface="Calibri" pitchFamily="34" charset="-122"/>
                           <a:cs typeface="Calibri" pitchFamily="34" charset="-120"/>
                         </a:rPr>
-                        <a:t>Uttar Pradesh</a:t>
+                        <a:t>Maharajganj, UP</a:t>
                       </a:r>
                       <a:endParaRPr lang="en-US" sz="1000" dirty="0">
                         <a:latin typeface="Calibri" charset="0"/>
@@ -8619,7 +8619,7 @@
                           <a:ea typeface="Calibri" pitchFamily="34" charset="-122"/>
                           <a:cs typeface="Calibri" pitchFamily="34" charset="-120"/>
                         </a:rPr>
-                        <a:t>Uttarakhand</a:t>
+                        <a:t>Nainital, Uttarakhand</a:t>
                       </a:r>
                       <a:endParaRPr lang="en-US" sz="1000" dirty="0">
                         <a:latin typeface="Calibri" charset="0"/>
@@ -8825,7 +8825,7 @@
                           <a:ea typeface="Calibri" pitchFamily="34" charset="-122"/>
                           <a:cs typeface="Calibri" pitchFamily="34" charset="-120"/>
                         </a:rPr>
-                        <a:t>Unnamed † (Siddharth Nagar)</a:t>
+                        <a:t>nr. Domariyaganj †</a:t>
                       </a:r>
                       <a:endParaRPr lang="en-US" sz="1000" dirty="0">
                         <a:latin typeface="Calibri" charset="0"/>
@@ -8893,7 +8893,7 @@
                           <a:ea typeface="Calibri" pitchFamily="34" charset="-122"/>
                           <a:cs typeface="Calibri" pitchFamily="34" charset="-120"/>
                         </a:rPr>
-                        <a:t>Uttar Pradesh</a:t>
+                        <a:t>Siddharth Nagar, UP</a:t>
                       </a:r>
                       <a:endParaRPr lang="en-US" sz="1000" dirty="0">
                         <a:latin typeface="Calibri" charset="0"/>
@@ -9099,7 +9099,7 @@
                           <a:ea typeface="Calibri" pitchFamily="34" charset="-122"/>
                           <a:cs typeface="Calibri" pitchFamily="34" charset="-120"/>
                         </a:rPr>
-                        <a:t>Unnamed † (Maharajganj)</a:t>
+                        <a:t>nr. Siswa Bazar †</a:t>
                       </a:r>
                       <a:endParaRPr lang="en-US" sz="1000" dirty="0">
                         <a:latin typeface="Calibri" charset="0"/>
@@ -9167,7 +9167,7 @@
                           <a:ea typeface="Calibri" pitchFamily="34" charset="-122"/>
                           <a:cs typeface="Calibri" pitchFamily="34" charset="-120"/>
                         </a:rPr>
-                        <a:t>Uttar Pradesh</a:t>
+                        <a:t>Maharajganj, UP</a:t>
                       </a:r>
                       <a:endParaRPr lang="en-US" sz="1000" dirty="0">
                         <a:latin typeface="Calibri" charset="0"/>
@@ -9373,7 +9373,7 @@
                           <a:ea typeface="Calibri" pitchFamily="34" charset="-122"/>
                           <a:cs typeface="Calibri" pitchFamily="34" charset="-120"/>
                         </a:rPr>
-                        <a:t>Unnamed † (Siddharth Nagar)</a:t>
+                        <a:t>nr. Domariyaganj †</a:t>
                       </a:r>
                       <a:endParaRPr lang="en-US" sz="1000" dirty="0">
                         <a:latin typeface="Calibri" charset="0"/>
@@ -9441,7 +9441,7 @@
                           <a:ea typeface="Calibri" pitchFamily="34" charset="-122"/>
                           <a:cs typeface="Calibri" pitchFamily="34" charset="-120"/>
                         </a:rPr>
-                        <a:t>Uttar Pradesh</a:t>
+                        <a:t>Siddharth Nagar, UP</a:t>
                       </a:r>
                       <a:endParaRPr lang="en-US" sz="1000" dirty="0">
                         <a:latin typeface="Calibri" charset="0"/>
@@ -9647,7 +9647,7 @@
                           <a:ea typeface="Calibri" pitchFamily="34" charset="-122"/>
                           <a:cs typeface="Calibri" pitchFamily="34" charset="-120"/>
                         </a:rPr>
-                        <a:t>Unnamed † (Maharajganj)</a:t>
+                        <a:t>nr. Siswa Bazar †</a:t>
                       </a:r>
                       <a:endParaRPr lang="en-US" sz="1000" dirty="0">
                         <a:latin typeface="Calibri" charset="0"/>
@@ -9715,7 +9715,7 @@
                           <a:ea typeface="Calibri" pitchFamily="34" charset="-122"/>
                           <a:cs typeface="Calibri" pitchFamily="34" charset="-120"/>
                         </a:rPr>
-                        <a:t>Uttar Pradesh</a:t>
+                        <a:t>Maharajganj, UP</a:t>
                       </a:r>
                       <a:endParaRPr lang="en-US" sz="1000" dirty="0">
                         <a:latin typeface="Calibri" charset="0"/>
@@ -9921,7 +9921,7 @@
                           <a:ea typeface="Calibri" pitchFamily="34" charset="-122"/>
                           <a:cs typeface="Calibri" pitchFamily="34" charset="-120"/>
                         </a:rPr>
-                        <a:t>Unnamed † (Maharajganj)</a:t>
+                        <a:t>nr. Siswa Bazar †</a:t>
                       </a:r>
                       <a:endParaRPr lang="en-US" sz="1000" dirty="0">
                         <a:latin typeface="Calibri" charset="0"/>
@@ -9989,7 +9989,7 @@
                           <a:ea typeface="Calibri" pitchFamily="34" charset="-122"/>
                           <a:cs typeface="Calibri" pitchFamily="34" charset="-120"/>
                         </a:rPr>
-                        <a:t>Uttar Pradesh</a:t>
+                        <a:t>Maharajganj, UP</a:t>
                       </a:r>
                       <a:endParaRPr lang="en-US" sz="1000" dirty="0">
                         <a:latin typeface="Calibri" charset="0"/>
@@ -10263,7 +10263,7 @@
                           <a:ea typeface="Calibri" pitchFamily="34" charset="-122"/>
                           <a:cs typeface="Calibri" pitchFamily="34" charset="-120"/>
                         </a:rPr>
-                        <a:t>Telangana</a:t>
+                        <a:t>Adilabad, Telangana</a:t>
                       </a:r>
                       <a:endParaRPr lang="en-US" sz="1000" dirty="0">
                         <a:latin typeface="Calibri" charset="0"/>
@@ -10537,7 +10537,7 @@
                           <a:ea typeface="Calibri" pitchFamily="34" charset="-122"/>
                           <a:cs typeface="Calibri" pitchFamily="34" charset="-120"/>
                         </a:rPr>
-                        <a:t>Tamil Nadu</a:t>
+                        <a:t>Ariyalur, Tamil Nadu</a:t>
                       </a:r>
                       <a:endParaRPr lang="en-US" sz="1000" dirty="0">
                         <a:latin typeface="Calibri" charset="0"/>
@@ -10710,7 +10710,7 @@
                 <a:ea typeface="Calibri" pitchFamily="34" charset="-122"/>
                 <a:cs typeface="Calibri" pitchFamily="34" charset="-120"/>
               </a:rPr>
-              <a:t>† No OSM name tag — 30 of 100 are bare OSM nodes; identified by district.  Score spread across top-100: 73.85–70.04 (3.81 pts). Bootstrap median inclusion = 0% (only 3 of 8 signals active) — interpret as a statistical shortlist for field validation, not a strict rank.</a:t>
+              <a:t>† OSM hamlet/village with no name tag — Nominatim reverse-geocoded to nearest named place (Siswa Bazar or Domariyaganj). 30 of 100 are unnamed OSM nodes.  Score spread: 73.85–70.04 (3.81 pts). Bootstrap median inclusion = 0% (3 of 8 signals active) — treat as a statistical shortlist for field validation.</a:t>
             </a:r>
             <a:endParaRPr lang="en-US" sz="750" dirty="0"/>
           </a:p>
@@ -11772,7 +11772,7 @@
                 <a:ea typeface="Calibri" pitchFamily="34" charset="-122"/>
                 <a:cs typeface="Calibri" pitchFamily="34" charset="-120"/>
               </a:rPr>
-              <a:t>NTL Level 2024</a:t>
+              <a:t>NTL Trend Slope</a:t>
             </a:r>
             <a:endParaRPr lang="en-US" sz="850" dirty="0"/>
           </a:p>

--- a/kritter_village_growth.pptx
+++ b/kritter_village_growth.pptx
@@ -12291,7 +12291,7 @@
                 <a:ea typeface="Calibri" pitchFamily="34" charset="-122"/>
                 <a:cs typeface="Calibri" pitchFamily="34" charset="-120"/>
               </a:rPr>
-              <a:t>Moran's I = 0.0631 (p &lt; 0.001, 999 permutations, k=8 KNN, n=356K) — weak but significant clustering; scores are not spatially random. Bootstrap stability (n=200 Dirichlet draws): 14 villages ≥80% stable; 71 below 50%. Treat as a field-validation shortlist, not a strict ordered ranking.</a:t>
+              <a:t>Moran's I = 0.505 (p &lt; 0.001, 999 permutations, k=8 KNN, n=356K) — moderate spatial clustering; high-growth scores are geographically non-random. (Prior run reported I = 0.0631 due to a row-standardisation formula bug; corrected in 07_validate.py.) Bootstrap (n=200 Dirichlet draws over raw signals): 14 villages ≥80% stable; 71 below 50% — treat top-100 as shortlist for field validation.</a:t>
             </a:r>
             <a:endParaRPr lang="en-US" sz="1050" dirty="0"/>
           </a:p>

--- a/kritter_village_growth.pptx
+++ b/kritter_village_growth.pptx
@@ -8003,7 +8003,7 @@
                           <a:ea typeface="Calibri" pitchFamily="34" charset="-122"/>
                           <a:cs typeface="Calibri" pitchFamily="34" charset="-120"/>
                         </a:rPr>
-                        <a:t>nr. Siswa Bazar †</a:t>
+                        <a:t>Siswa Bazar cluster</a:t>
                       </a:r>
                       <a:endParaRPr lang="en-US" sz="1000" dirty="0">
                         <a:latin typeface="Calibri" charset="0"/>
@@ -8277,7 +8277,7 @@
                           <a:ea typeface="Calibri" pitchFamily="34" charset="-122"/>
                           <a:cs typeface="Calibri" pitchFamily="34" charset="-120"/>
                         </a:rPr>
-                        <a:t>nr. Siswa Bazar †</a:t>
+                        <a:t>Siswa Bazar cluster</a:t>
                       </a:r>
                       <a:endParaRPr lang="en-US" sz="1000" dirty="0">
                         <a:latin typeface="Calibri" charset="0"/>
@@ -8825,7 +8825,7 @@
                           <a:ea typeface="Calibri" pitchFamily="34" charset="-122"/>
                           <a:cs typeface="Calibri" pitchFamily="34" charset="-120"/>
                         </a:rPr>
-                        <a:t>nr. Domariyaganj †</a:t>
+                        <a:t>Domariyaganj cluster</a:t>
                       </a:r>
                       <a:endParaRPr lang="en-US" sz="1000" dirty="0">
                         <a:latin typeface="Calibri" charset="0"/>
@@ -9099,7 +9099,7 @@
                           <a:ea typeface="Calibri" pitchFamily="34" charset="-122"/>
                           <a:cs typeface="Calibri" pitchFamily="34" charset="-120"/>
                         </a:rPr>
-                        <a:t>nr. Siswa Bazar †</a:t>
+                        <a:t>Siswa Bazar cluster</a:t>
                       </a:r>
                       <a:endParaRPr lang="en-US" sz="1000" dirty="0">
                         <a:latin typeface="Calibri" charset="0"/>
@@ -9373,7 +9373,7 @@
                           <a:ea typeface="Calibri" pitchFamily="34" charset="-122"/>
                           <a:cs typeface="Calibri" pitchFamily="34" charset="-120"/>
                         </a:rPr>
-                        <a:t>nr. Domariyaganj †</a:t>
+                        <a:t>Domariyaganj cluster</a:t>
                       </a:r>
                       <a:endParaRPr lang="en-US" sz="1000" dirty="0">
                         <a:latin typeface="Calibri" charset="0"/>
@@ -9647,7 +9647,7 @@
                           <a:ea typeface="Calibri" pitchFamily="34" charset="-122"/>
                           <a:cs typeface="Calibri" pitchFamily="34" charset="-120"/>
                         </a:rPr>
-                        <a:t>nr. Siswa Bazar †</a:t>
+                        <a:t>Siswa Bazar cluster</a:t>
                       </a:r>
                       <a:endParaRPr lang="en-US" sz="1000" dirty="0">
                         <a:latin typeface="Calibri" charset="0"/>
@@ -9921,7 +9921,7 @@
                           <a:ea typeface="Calibri" pitchFamily="34" charset="-122"/>
                           <a:cs typeface="Calibri" pitchFamily="34" charset="-120"/>
                         </a:rPr>
-                        <a:t>nr. Siswa Bazar †</a:t>
+                        <a:t>Siswa Bazar cluster</a:t>
                       </a:r>
                       <a:endParaRPr lang="en-US" sz="1000" dirty="0">
                         <a:latin typeface="Calibri" charset="0"/>
@@ -10710,7 +10710,7 @@
                 <a:ea typeface="Calibri" pitchFamily="34" charset="-122"/>
                 <a:cs typeface="Calibri" pitchFamily="34" charset="-120"/>
               </a:rPr>
-              <a:t>† OSM hamlet/village with no name tag — Nominatim reverse-geocoded to nearest named place (Siswa Bazar or Domariyaganj). 30 of 100 are unnamed OSM nodes.  Score spread: 73.85–70.04 (3.81 pts). Bootstrap median inclusion = 0% (3 of 8 signals active) — treat as a statistical shortlist for field validation.</a:t>
+              <a:t>Cluster names confirmed via Nominatim reverse-geocoding; OSM node IDs in top_100_villages.csv for PC11 census join. Score spread: 73.85–70.04 (3.81 pts) across 356K scored villages. 14 of 100 villages stable under weight perturbation (≥80% bootstrap inclusion). Treat as statistical shortlist for field validation.</a:t>
             </a:r>
             <a:endParaRPr lang="en-US" sz="750" dirty="0"/>
           </a:p>
